--- a/presentation/global-sports-platform-architecture.pptx
+++ b/presentation/global-sports-platform-architecture.pptx
@@ -1542,7 +1542,7 @@
               <a:buNone/>
             </a:pPr>
             <a:r>
-              <a:rPr lang="en-US" sz="1500" dirty="0">
+              <a:rPr lang="en-US" sz="1500" b="1" dirty="0">
                 <a:solidFill>
                   <a:srgbClr val="102033"/>
                 </a:solidFill>
@@ -1552,7 +1552,7 @@
               </a:rPr>
               <a:t>Вовлечённость</a:t>
             </a:r>
-            <a:endParaRPr lang="en-US" sz="1500" dirty="0"/>
+            <a:endParaRPr lang="en-US" sz="1500" b="1" dirty="0"/>
           </a:p>
           <a:p>
             <a:pPr marL="0" indent="0" algn="ctr">
@@ -1653,7 +1653,7 @@
               <a:buNone/>
             </a:pPr>
             <a:r>
-              <a:rPr lang="en-US" sz="1500" dirty="0">
+              <a:rPr lang="en-US" sz="1500" b="1" dirty="0">
                 <a:solidFill>
                   <a:srgbClr val="102033"/>
                 </a:solidFill>
@@ -1663,7 +1663,7 @@
               </a:rPr>
               <a:t>Сообщества</a:t>
             </a:r>
-            <a:endParaRPr lang="en-US" sz="1500" dirty="0"/>
+            <a:endParaRPr lang="en-US" sz="1500" b="1" dirty="0"/>
           </a:p>
           <a:p>
             <a:pPr marL="0" indent="0" algn="ctr">
@@ -1764,7 +1764,7 @@
               <a:buNone/>
             </a:pPr>
             <a:r>
-              <a:rPr lang="en-US" sz="1500" dirty="0">
+              <a:rPr lang="en-US" sz="1500" b="1" dirty="0">
                 <a:solidFill>
                   <a:srgbClr val="102033"/>
                 </a:solidFill>
@@ -1774,7 +1774,7 @@
               </a:rPr>
               <a:t>Лояльность</a:t>
             </a:r>
-            <a:endParaRPr lang="en-US" sz="1500" dirty="0"/>
+            <a:endParaRPr lang="en-US" sz="1500" b="1" dirty="0"/>
           </a:p>
           <a:p>
             <a:pPr marL="0" indent="0" algn="ctr">
@@ -1875,32 +1875,15 @@
               <a:buNone/>
             </a:pPr>
             <a:r>
-              <a:rPr lang="en-US" sz="1500" dirty="0">
-                <a:solidFill>
-                  <a:srgbClr val="102033"/>
-                </a:solidFill>
-                <a:latin typeface="Aptos" pitchFamily="34" charset="0"/>
-                <a:ea typeface="Aptos" pitchFamily="34" charset="-122"/>
-                <a:cs typeface="Aptos" pitchFamily="34" charset="-120"/>
-              </a:rPr>
-              <a:t>Платформа</a:t>
-            </a:r>
-            <a:endParaRPr lang="en-US" sz="1500" dirty="0"/>
-          </a:p>
-          <a:p>
-            <a:pPr marL="0" indent="0" algn="ctr">
-              <a:buNone/>
-            </a:pPr>
-            <a:r>
-              <a:rPr lang="en-US" sz="1500" dirty="0">
-                <a:solidFill>
-                  <a:srgbClr val="102033"/>
-                </a:solidFill>
-                <a:latin typeface="Aptos" pitchFamily="34" charset="0"/>
-                <a:ea typeface="Aptos" pitchFamily="34" charset="-122"/>
-                <a:cs typeface="Aptos" pitchFamily="34" charset="-120"/>
-              </a:rPr>
-              <a:t>Дать основу для глобального роста, устройств и новых видов спорта.</a:t>
+              <a:rPr lang="ru-RU" sz="1600" b="1" dirty="0"/>
+              <a:t>Эффективное расширение</a:t>
+            </a:r>
+            <a:br>
+              <a:rPr lang="ru-RU" sz="1600" dirty="0"/>
+            </a:br>
+            <a:r>
+              <a:rPr lang="ru-RU" sz="1600" dirty="0"/>
+              <a:t>Выходить в новые регионы, подключать виды спорта и устройства без полной переработки платформы.</a:t>
             </a:r>
             <a:endParaRPr lang="en-US" sz="1500" dirty="0"/>
           </a:p>
@@ -3082,7 +3065,7 @@
         </p:nvSpPr>
         <p:spPr>
           <a:xfrm>
-            <a:off x="685800" y="1874520"/>
+            <a:off x="588101" y="1848851"/>
             <a:ext cx="1938528" cy="1920240"/>
           </a:xfrm>
           <a:prstGeom prst="rect">
@@ -3186,7 +3169,7 @@
         </p:nvSpPr>
         <p:spPr>
           <a:xfrm>
-            <a:off x="2880360" y="2633472"/>
+            <a:off x="2614335" y="2626360"/>
             <a:ext cx="365760" cy="320040"/>
           </a:xfrm>
           <a:prstGeom prst="rect">
@@ -3227,7 +3210,7 @@
         </p:nvSpPr>
         <p:spPr>
           <a:xfrm>
-            <a:off x="3246120" y="1874520"/>
+            <a:off x="2938839" y="1874520"/>
             <a:ext cx="1938528" cy="1920240"/>
           </a:xfrm>
           <a:prstGeom prst="rect">
@@ -3331,7 +3314,7 @@
         </p:nvSpPr>
         <p:spPr>
           <a:xfrm>
-            <a:off x="5440680" y="2633472"/>
+            <a:off x="4920464" y="2633472"/>
             <a:ext cx="365760" cy="320040"/>
           </a:xfrm>
           <a:prstGeom prst="rect">
@@ -3372,7 +3355,7 @@
         </p:nvSpPr>
         <p:spPr>
           <a:xfrm>
-            <a:off x="5806440" y="1874520"/>
+            <a:off x="5286224" y="1874520"/>
             <a:ext cx="1938528" cy="1920240"/>
           </a:xfrm>
           <a:prstGeom prst="rect">
@@ -3510,8 +3493,8 @@
         </p:nvSpPr>
         <p:spPr>
           <a:xfrm>
-            <a:off x="8001000" y="2633472"/>
-            <a:ext cx="365760" cy="320040"/>
+            <a:off x="7205938" y="2626360"/>
+            <a:ext cx="330200" cy="320040"/>
           </a:xfrm>
           <a:prstGeom prst="rect">
             <a:avLst/>
@@ -3551,8 +3534,8 @@
         </p:nvSpPr>
         <p:spPr>
           <a:xfrm>
-            <a:off x="8366760" y="1874520"/>
-            <a:ext cx="2514600" cy="1920240"/>
+            <a:off x="9899622" y="1908249"/>
+            <a:ext cx="1955800" cy="1920240"/>
           </a:xfrm>
           <a:prstGeom prst="rect">
             <a:avLst/>
@@ -3772,6 +3755,146 @@
               <a:t>Принцип: основной сценарий “записать тренировку” изолирован от вторичных функций. Если аналитика или уведомления временно недоступны, тренировка всё равно сохраняется.</a:t>
             </a:r>
             <a:endParaRPr lang="en-US" sz="1250" dirty="0"/>
+          </a:p>
+        </p:txBody>
+      </p:sp>
+      <p:sp>
+        <p:nvSpPr>
+          <p:cNvPr id="15" name="TextBox 14">
+            <a:extLst>
+              <a:ext uri="{FF2B5EF4-FFF2-40B4-BE49-F238E27FC236}">
+                <a16:creationId xmlns:a16="http://schemas.microsoft.com/office/drawing/2014/main" id="{50B563B4-2AC2-4DA1-8CAB-16E203962879}"/>
+              </a:ext>
+            </a:extLst>
+          </p:cNvPr>
+          <p:cNvSpPr txBox="1"/>
+          <p:nvPr/>
+        </p:nvSpPr>
+        <p:spPr>
+          <a:xfrm>
+            <a:off x="9540087" y="2547859"/>
+            <a:ext cx="317500" cy="317500"/>
+          </a:xfrm>
+          <a:prstGeom prst="rect">
+            <a:avLst/>
+          </a:prstGeom>
+          <a:noFill/>
+        </p:spPr>
+        <p:txBody>
+          <a:bodyPr vertOverflow="overflow" vert="horz" wrap="square" rtlCol="0" anchor="t">
+            <a:spAutoFit/>
+          </a:bodyPr>
+          <a:lstStyle/>
+          <a:p>
+            <a:pPr algn="l"/>
+            <a:r>
+              <a:rPr lang="ru-RU" sz="2000" b="1" dirty="0">
+                <a:solidFill>
+                  <a:srgbClr val="1E63D6"/>
+                </a:solidFill>
+                <a:latin typeface="Aptos"/>
+              </a:rPr>
+              <a:t>→</a:t>
+            </a:r>
+          </a:p>
+        </p:txBody>
+      </p:sp>
+      <p:sp>
+        <p:nvSpPr>
+          <p:cNvPr id="16" name="Text 10">
+            <a:extLst>
+              <a:ext uri="{FF2B5EF4-FFF2-40B4-BE49-F238E27FC236}">
+                <a16:creationId xmlns:a16="http://schemas.microsoft.com/office/drawing/2014/main" id="{C114E2E9-34DF-0690-FD4C-C5C80C5DA12E}"/>
+              </a:ext>
+            </a:extLst>
+          </p:cNvPr>
+          <p:cNvSpPr/>
+          <p:nvPr/>
+        </p:nvSpPr>
+        <p:spPr>
+          <a:xfrm>
+            <a:off x="7584287" y="1878526"/>
+            <a:ext cx="1955800" cy="1920240"/>
+          </a:xfrm>
+          <a:prstGeom prst="rect">
+            <a:avLst/>
+          </a:prstGeom>
+          <a:solidFill>
+            <a:srgbClr val="FFFFFF"/>
+          </a:solidFill>
+          <a:ln w="12700">
+            <a:solidFill>
+              <a:srgbClr val="D98C10"/>
+            </a:solidFill>
+          </a:ln>
+        </p:spPr>
+        <p:txBody>
+          <a:bodyPr wrap="square" lIns="2032" tIns="2032" rIns="2032" bIns="2032" rtlCol="0" anchor="ctr">
+            <a:normAutofit/>
+          </a:bodyPr>
+          <a:lstStyle/>
+          <a:p>
+            <a:pPr algn="ctr"/>
+            <a:r>
+              <a:rPr lang="en-US" sz="1400" dirty="0">
+                <a:solidFill>
+                  <a:srgbClr val="102033"/>
+                </a:solidFill>
+                <a:latin typeface="Aptos"/>
+              </a:rPr>
+              <a:t>Reliable Event Delivery</a:t>
+            </a:r>
+          </a:p>
+          <a:p>
+            <a:pPr algn="ctr"/>
+            <a:endParaRPr lang="en-US" sz="1400" dirty="0">
+              <a:solidFill>
+                <a:srgbClr val="102033"/>
+              </a:solidFill>
+              <a:latin typeface="Aptos"/>
+            </a:endParaRPr>
+          </a:p>
+          <a:p>
+            <a:pPr algn="ctr"/>
+            <a:r>
+              <a:rPr lang="en-US" sz="1400" dirty="0">
+                <a:solidFill>
+                  <a:srgbClr val="102033"/>
+                </a:solidFill>
+                <a:latin typeface="Aptos"/>
+              </a:rPr>
+              <a:t>Transactional Outbox</a:t>
+            </a:r>
+          </a:p>
+          <a:p>
+            <a:pPr algn="ctr"/>
+            <a:r>
+              <a:rPr lang="en-US" sz="1400" dirty="0">
+                <a:solidFill>
+                  <a:srgbClr val="102033"/>
+                </a:solidFill>
+                <a:latin typeface="Aptos"/>
+              </a:rPr>
+              <a:t>        ↓</a:t>
+            </a:r>
+          </a:p>
+          <a:p>
+            <a:pPr algn="ctr"/>
+            <a:r>
+              <a:rPr lang="en-US" sz="1400" dirty="0">
+                <a:solidFill>
+                  <a:srgbClr val="102033"/>
+                </a:solidFill>
+                <a:latin typeface="Aptos"/>
+              </a:rPr>
+              <a:t>Event Bus</a:t>
+            </a:r>
+            <a:endParaRPr lang="ru-RU" sz="1400" dirty="0">
+              <a:solidFill>
+                <a:srgbClr val="102033"/>
+              </a:solidFill>
+              <a:latin typeface="Aptos"/>
+            </a:endParaRPr>
           </a:p>
         </p:txBody>
       </p:sp>
@@ -7065,7 +7188,7 @@
 
 <file path=ppt/webextensions/taskpanes.xml><?xml version="1.0" encoding="utf-8"?>
 <wetp:taskpanes xmlns:wetp="http://schemas.microsoft.com/office/webextensions/taskpanes/2010/11">
-  <wetp:taskpane dockstate="right" visibility="0" width="312" row="0">
+  <wetp:taskpane dockstate="right" visibility="0" width="801" row="0">
     <wetp:webextensionref xmlns:r="http://schemas.openxmlformats.org/officeDocument/2006/relationships" r:id="rId1"/>
   </wetp:taskpane>
 </wetp:taskpanes>
